--- a/Doc/NN_Transformers.pptx
+++ b/Doc/NN_Transformers.pptx
@@ -7,8 +7,10 @@
   <p:sldIdLst>
     <p:sldId id="256" r:id="rId2"/>
     <p:sldId id="257" r:id="rId3"/>
-    <p:sldId id="259" r:id="rId4"/>
-    <p:sldId id="258" r:id="rId5"/>
+    <p:sldId id="260" r:id="rId4"/>
+    <p:sldId id="261" r:id="rId5"/>
+    <p:sldId id="259" r:id="rId6"/>
+    <p:sldId id="258" r:id="rId7"/>
   </p:sldIdLst>
   <p:sldSz cx="12192000" cy="6858000"/>
   <p:notesSz cx="6858000" cy="9144000"/>
@@ -264,7 +266,7 @@
           <a:p>
             <a:fld id="{C09F670F-83AC-4ADA-9F59-ECF0488013E9}" type="datetimeFigureOut">
               <a:rPr lang="en-CA" smtClean="0"/>
-              <a:t>2025-11-09</a:t>
+              <a:t>2025-11-11</a:t>
             </a:fld>
             <a:endParaRPr lang="en-CA"/>
           </a:p>
@@ -464,7 +466,7 @@
           <a:p>
             <a:fld id="{C09F670F-83AC-4ADA-9F59-ECF0488013E9}" type="datetimeFigureOut">
               <a:rPr lang="en-CA" smtClean="0"/>
-              <a:t>2025-11-09</a:t>
+              <a:t>2025-11-11</a:t>
             </a:fld>
             <a:endParaRPr lang="en-CA"/>
           </a:p>
@@ -674,7 +676,7 @@
           <a:p>
             <a:fld id="{C09F670F-83AC-4ADA-9F59-ECF0488013E9}" type="datetimeFigureOut">
               <a:rPr lang="en-CA" smtClean="0"/>
-              <a:t>2025-11-09</a:t>
+              <a:t>2025-11-11</a:t>
             </a:fld>
             <a:endParaRPr lang="en-CA"/>
           </a:p>
@@ -874,7 +876,7 @@
           <a:p>
             <a:fld id="{C09F670F-83AC-4ADA-9F59-ECF0488013E9}" type="datetimeFigureOut">
               <a:rPr lang="en-CA" smtClean="0"/>
-              <a:t>2025-11-09</a:t>
+              <a:t>2025-11-11</a:t>
             </a:fld>
             <a:endParaRPr lang="en-CA"/>
           </a:p>
@@ -1150,7 +1152,7 @@
           <a:p>
             <a:fld id="{C09F670F-83AC-4ADA-9F59-ECF0488013E9}" type="datetimeFigureOut">
               <a:rPr lang="en-CA" smtClean="0"/>
-              <a:t>2025-11-09</a:t>
+              <a:t>2025-11-11</a:t>
             </a:fld>
             <a:endParaRPr lang="en-CA"/>
           </a:p>
@@ -1418,7 +1420,7 @@
           <a:p>
             <a:fld id="{C09F670F-83AC-4ADA-9F59-ECF0488013E9}" type="datetimeFigureOut">
               <a:rPr lang="en-CA" smtClean="0"/>
-              <a:t>2025-11-09</a:t>
+              <a:t>2025-11-11</a:t>
             </a:fld>
             <a:endParaRPr lang="en-CA"/>
           </a:p>
@@ -1833,7 +1835,7 @@
           <a:p>
             <a:fld id="{C09F670F-83AC-4ADA-9F59-ECF0488013E9}" type="datetimeFigureOut">
               <a:rPr lang="en-CA" smtClean="0"/>
-              <a:t>2025-11-09</a:t>
+              <a:t>2025-11-11</a:t>
             </a:fld>
             <a:endParaRPr lang="en-CA"/>
           </a:p>
@@ -1975,7 +1977,7 @@
           <a:p>
             <a:fld id="{C09F670F-83AC-4ADA-9F59-ECF0488013E9}" type="datetimeFigureOut">
               <a:rPr lang="en-CA" smtClean="0"/>
-              <a:t>2025-11-09</a:t>
+              <a:t>2025-11-11</a:t>
             </a:fld>
             <a:endParaRPr lang="en-CA"/>
           </a:p>
@@ -2088,7 +2090,7 @@
           <a:p>
             <a:fld id="{C09F670F-83AC-4ADA-9F59-ECF0488013E9}" type="datetimeFigureOut">
               <a:rPr lang="en-CA" smtClean="0"/>
-              <a:t>2025-11-09</a:t>
+              <a:t>2025-11-11</a:t>
             </a:fld>
             <a:endParaRPr lang="en-CA"/>
           </a:p>
@@ -2401,7 +2403,7 @@
           <a:p>
             <a:fld id="{C09F670F-83AC-4ADA-9F59-ECF0488013E9}" type="datetimeFigureOut">
               <a:rPr lang="en-CA" smtClean="0"/>
-              <a:t>2025-11-09</a:t>
+              <a:t>2025-11-11</a:t>
             </a:fld>
             <a:endParaRPr lang="en-CA"/>
           </a:p>
@@ -2690,7 +2692,7 @@
           <a:p>
             <a:fld id="{C09F670F-83AC-4ADA-9F59-ECF0488013E9}" type="datetimeFigureOut">
               <a:rPr lang="en-CA" smtClean="0"/>
-              <a:t>2025-11-09</a:t>
+              <a:t>2025-11-11</a:t>
             </a:fld>
             <a:endParaRPr lang="en-CA"/>
           </a:p>
@@ -2933,7 +2935,7 @@
           <a:p>
             <a:fld id="{C09F670F-83AC-4ADA-9F59-ECF0488013E9}" type="datetimeFigureOut">
               <a:rPr lang="en-CA" smtClean="0"/>
-              <a:t>2025-11-09</a:t>
+              <a:t>2025-11-11</a:t>
             </a:fld>
             <a:endParaRPr lang="en-CA"/>
           </a:p>
@@ -3572,6 +3574,254 @@
           <p:cNvPr id="2" name="Title 1">
             <a:extLst>
               <a:ext uri="{FF2B5EF4-FFF2-40B4-BE49-F238E27FC236}">
+                <a16:creationId xmlns:a16="http://schemas.microsoft.com/office/drawing/2014/main" id="{8E280089-DD65-4FF5-B6DC-BF5C52FF5CCF}"/>
+              </a:ext>
+            </a:extLst>
+          </p:cNvPr>
+          <p:cNvSpPr>
+            <a:spLocks noGrp="1"/>
+          </p:cNvSpPr>
+          <p:nvPr>
+            <p:ph type="title"/>
+          </p:nvPr>
+        </p:nvSpPr>
+        <p:spPr/>
+        <p:txBody>
+          <a:bodyPr/>
+          <a:lstStyle/>
+          <a:p>
+            <a:r>
+              <a:rPr lang="en-CA" dirty="0"/>
+              <a:t>What is a Transformer?</a:t>
+            </a:r>
+          </a:p>
+        </p:txBody>
+      </p:sp>
+      <p:sp>
+        <p:nvSpPr>
+          <p:cNvPr id="3" name="Content Placeholder 2">
+            <a:extLst>
+              <a:ext uri="{FF2B5EF4-FFF2-40B4-BE49-F238E27FC236}">
+                <a16:creationId xmlns:a16="http://schemas.microsoft.com/office/drawing/2014/main" id="{CB948B64-C8B8-D54E-9A24-EA14F40F8EFD}"/>
+              </a:ext>
+            </a:extLst>
+          </p:cNvPr>
+          <p:cNvSpPr>
+            <a:spLocks noGrp="1"/>
+          </p:cNvSpPr>
+          <p:nvPr>
+            <p:ph idx="1"/>
+          </p:nvPr>
+        </p:nvSpPr>
+        <p:spPr/>
+        <p:txBody>
+          <a:bodyPr>
+            <a:normAutofit/>
+          </a:bodyPr>
+          <a:lstStyle/>
+          <a:p>
+            <a:r>
+              <a:rPr lang="en-CA" sz="1400" dirty="0">
+                <a:hlinkClick r:id="rId2"/>
+              </a:rPr>
+              <a:t>https://poloclub.github.io/transformer-explainer/</a:t>
+            </a:r>
+            <a:r>
+              <a:rPr lang="en-CA" sz="1400" dirty="0"/>
+              <a:t> </a:t>
+            </a:r>
+          </a:p>
+          <a:p>
+            <a:r>
+              <a:rPr lang="en-CA" sz="1400" dirty="0"/>
+              <a:t>Transformer Architecture</a:t>
+            </a:r>
+          </a:p>
+          <a:p>
+            <a:r>
+              <a:rPr lang="en-US" sz="1500" dirty="0"/>
+              <a:t>Every text-generative Transformer consists of these </a:t>
+            </a:r>
+            <a:r>
+              <a:rPr lang="en-US" sz="1500" b="1" dirty="0"/>
+              <a:t>three key components</a:t>
+            </a:r>
+            <a:r>
+              <a:rPr lang="en-US" sz="1500" dirty="0"/>
+              <a:t>:</a:t>
+            </a:r>
+          </a:p>
+          <a:p>
+            <a:r>
+              <a:rPr lang="en-US" sz="1500" b="1" dirty="0"/>
+              <a:t>Embedding</a:t>
+            </a:r>
+            <a:r>
+              <a:rPr lang="en-US" sz="1500" dirty="0"/>
+              <a:t>: Text input is divided into smaller units called tokens, which can be words or </a:t>
+            </a:r>
+            <a:r>
+              <a:rPr lang="en-US" sz="1500" dirty="0" err="1"/>
+              <a:t>subwords</a:t>
+            </a:r>
+            <a:r>
+              <a:rPr lang="en-US" sz="1500" dirty="0"/>
+              <a:t>. These tokens are converted into numerical vectors called embeddings, which capture the semantic meaning of words.</a:t>
+            </a:r>
+          </a:p>
+          <a:p>
+            <a:r>
+              <a:rPr lang="en-US" sz="1500" b="1" dirty="0"/>
+              <a:t>Transformer Block</a:t>
+            </a:r>
+            <a:r>
+              <a:rPr lang="en-US" sz="1500" dirty="0"/>
+              <a:t> is the fundamental building block of the model that processes and transforms the input data. Each block includes:</a:t>
+            </a:r>
+          </a:p>
+          <a:p>
+            <a:pPr lvl="1"/>
+            <a:r>
+              <a:rPr lang="en-US" sz="1500" b="1" dirty="0"/>
+              <a:t>Attention Mechanism</a:t>
+            </a:r>
+            <a:r>
+              <a:rPr lang="en-US" sz="1500" dirty="0"/>
+              <a:t>, the core component of the Transformer block. It allows tokens to communicate with other tokens, capturing contextual information and relationships between words.</a:t>
+            </a:r>
+          </a:p>
+          <a:p>
+            <a:pPr lvl="1"/>
+            <a:r>
+              <a:rPr lang="en-US" sz="1500" b="1" dirty="0"/>
+              <a:t>MLP (Multilayer Perceptron) Layer</a:t>
+            </a:r>
+            <a:r>
+              <a:rPr lang="en-US" sz="1500" dirty="0"/>
+              <a:t>, a feed-forward network that operates on each token independently. While the goal of the attention layer is to route information between tokens, the goal of the MLP is to refine each token's representation.</a:t>
+            </a:r>
+          </a:p>
+          <a:p>
+            <a:r>
+              <a:rPr lang="en-US" sz="1500" b="1" dirty="0"/>
+              <a:t>Output Probabilities</a:t>
+            </a:r>
+            <a:r>
+              <a:rPr lang="en-US" sz="1500" dirty="0"/>
+              <a:t>: The final linear and </a:t>
+            </a:r>
+            <a:r>
+              <a:rPr lang="en-US" sz="1500" dirty="0" err="1"/>
+              <a:t>softmax</a:t>
+            </a:r>
+            <a:r>
+              <a:rPr lang="en-US" sz="1500" dirty="0"/>
+              <a:t> layers transform the processed embeddings into probabilities, enabling the model to make predictions about the next token in a sequence.</a:t>
+            </a:r>
+          </a:p>
+          <a:p>
+            <a:endParaRPr lang="en-CA" sz="1400" dirty="0"/>
+          </a:p>
+          <a:p>
+            <a:endParaRPr lang="en-CA" sz="1400" dirty="0"/>
+          </a:p>
+        </p:txBody>
+      </p:sp>
+    </p:spTree>
+    <p:extLst>
+      <p:ext uri="{BB962C8B-B14F-4D97-AF65-F5344CB8AC3E}">
+        <p14:creationId xmlns:p14="http://schemas.microsoft.com/office/powerpoint/2010/main" val="812609636"/>
+      </p:ext>
+    </p:extLst>
+  </p:cSld>
+  <p:clrMapOvr>
+    <a:masterClrMapping/>
+  </p:clrMapOvr>
+</p:sld>
+</file>
+
+<file path=ppt/slides/slide4.xml><?xml version="1.0" encoding="utf-8"?>
+<p:sld xmlns:a="http://schemas.openxmlformats.org/drawingml/2006/main" xmlns:r="http://schemas.openxmlformats.org/officeDocument/2006/relationships" xmlns:p="http://schemas.openxmlformats.org/presentationml/2006/main">
+  <p:cSld>
+    <p:spTree>
+      <p:nvGrpSpPr>
+        <p:cNvPr id="1" name=""/>
+        <p:cNvGrpSpPr/>
+        <p:nvPr/>
+      </p:nvGrpSpPr>
+      <p:grpSpPr>
+        <a:xfrm>
+          <a:off x="0" y="0"/>
+          <a:ext cx="0" cy="0"/>
+          <a:chOff x="0" y="0"/>
+          <a:chExt cx="0" cy="0"/>
+        </a:xfrm>
+      </p:grpSpPr>
+      <p:pic>
+        <p:nvPicPr>
+          <p:cNvPr id="4" name="Picture 3">
+            <a:extLst>
+              <a:ext uri="{FF2B5EF4-FFF2-40B4-BE49-F238E27FC236}">
+                <a16:creationId xmlns:a16="http://schemas.microsoft.com/office/drawing/2014/main" id="{57D6EB2C-A317-0FD8-639F-C57D6D98AABA}"/>
+              </a:ext>
+            </a:extLst>
+          </p:cNvPr>
+          <p:cNvPicPr>
+            <a:picLocks noChangeAspect="1"/>
+          </p:cNvPicPr>
+          <p:nvPr/>
+        </p:nvPicPr>
+        <p:blipFill>
+          <a:blip r:embed="rId2"/>
+          <a:stretch>
+            <a:fillRect/>
+          </a:stretch>
+        </p:blipFill>
+        <p:spPr>
+          <a:xfrm>
+            <a:off x="1034745" y="0"/>
+            <a:ext cx="10122509" cy="6858000"/>
+          </a:xfrm>
+          <a:prstGeom prst="rect">
+            <a:avLst/>
+          </a:prstGeom>
+        </p:spPr>
+      </p:pic>
+    </p:spTree>
+    <p:extLst>
+      <p:ext uri="{BB962C8B-B14F-4D97-AF65-F5344CB8AC3E}">
+        <p14:creationId xmlns:p14="http://schemas.microsoft.com/office/powerpoint/2010/main" val="4021695428"/>
+      </p:ext>
+    </p:extLst>
+  </p:cSld>
+  <p:clrMapOvr>
+    <a:masterClrMapping/>
+  </p:clrMapOvr>
+</p:sld>
+</file>
+
+<file path=ppt/slides/slide5.xml><?xml version="1.0" encoding="utf-8"?>
+<p:sld xmlns:a="http://schemas.openxmlformats.org/drawingml/2006/main" xmlns:r="http://schemas.openxmlformats.org/officeDocument/2006/relationships" xmlns:p="http://schemas.openxmlformats.org/presentationml/2006/main">
+  <p:cSld>
+    <p:spTree>
+      <p:nvGrpSpPr>
+        <p:cNvPr id="1" name=""/>
+        <p:cNvGrpSpPr/>
+        <p:nvPr/>
+      </p:nvGrpSpPr>
+      <p:grpSpPr>
+        <a:xfrm>
+          <a:off x="0" y="0"/>
+          <a:ext cx="0" cy="0"/>
+          <a:chOff x="0" y="0"/>
+          <a:chExt cx="0" cy="0"/>
+        </a:xfrm>
+      </p:grpSpPr>
+      <p:sp>
+        <p:nvSpPr>
+          <p:cNvPr id="2" name="Title 1">
+            <a:extLst>
+              <a:ext uri="{FF2B5EF4-FFF2-40B4-BE49-F238E27FC236}">
                 <a16:creationId xmlns:a16="http://schemas.microsoft.com/office/drawing/2014/main" id="{F935B0ED-AF6C-E80F-AA2E-251DE2DBA71D}"/>
               </a:ext>
             </a:extLst>
@@ -3640,7 +3890,7 @@
 </p:sld>
 </file>
 
-<file path=ppt/slides/slide4.xml><?xml version="1.0" encoding="utf-8"?>
+<file path=ppt/slides/slide6.xml><?xml version="1.0" encoding="utf-8"?>
 <p:sld xmlns:a="http://schemas.openxmlformats.org/drawingml/2006/main" xmlns:r="http://schemas.openxmlformats.org/officeDocument/2006/relationships" xmlns:p="http://schemas.openxmlformats.org/presentationml/2006/main">
   <p:cSld>
     <p:spTree>
